--- a/Science_Complete_Course_SagarSir/04_Science_MahaManthan_मॉक_टेस्ट्स/Class_21_Grand_Final_Science_MahaManthan.pptx
+++ b/Science_Complete_Course_SagarSir/04_Science_MahaManthan_मॉक_टेस्ट्स/Class_21_Grand_Final_Science_MahaManthan.pptx
@@ -3621,7 +3621,7 @@
               </a:defRPr>
             </a:pPr>
             <a:r>
-              <a:t>मार्गदर्शक: सागर सर (NMMS King)  |  Helpline / WhatsApp: +91 91101 13671  |  Website: sagarcoaching.tech</a:t>
+              <a:t>मार्गदर्शक: सागर सर (NMMS King)  |  Website: sagarcoaching.tech</a:t>
             </a:r>
           </a:p>
         </p:txBody>
@@ -3793,7 +3793,7 @@
               </a:defRPr>
             </a:pPr>
             <a:r>
-              <a:t>WhatsApp / Helpline: +91 91101 13671  |  वेबसाइट: sagarcoaching.tech  |  Slide 10 of 105</a:t>
+              <a:t>वेबसाइट: sagarcoaching.tech  |  Slide 10 of 105</a:t>
             </a:r>
           </a:p>
         </p:txBody>
@@ -4311,7 +4311,7 @@
               </a:defRPr>
             </a:pPr>
             <a:r>
-              <a:t>WhatsApp / Helpline: +91 91101 13671  |  वेबसाइट: sagarcoaching.tech  |  Slide 100 of 105</a:t>
+              <a:t>वेबसाइट: sagarcoaching.tech  |  Slide 100 of 105</a:t>
             </a:r>
           </a:p>
         </p:txBody>
@@ -4829,7 +4829,7 @@
               </a:defRPr>
             </a:pPr>
             <a:r>
-              <a:t>WhatsApp / Helpline: +91 91101 13671  |  वेबसाइट: sagarcoaching.tech  |  Slide 101 of 105</a:t>
+              <a:t>वेबसाइट: sagarcoaching.tech  |  Slide 101 of 105</a:t>
             </a:r>
           </a:p>
         </p:txBody>
@@ -5276,7 +5276,7 @@
               </a:defRPr>
             </a:pPr>
             <a:r>
-              <a:t>WhatsApp / Helpline: +91 91101 13671  |  वेबसाइट: sagarcoaching.tech  |  Slide 102 of 105</a:t>
+              <a:t>वेबसाइट: sagarcoaching.tech  |  Slide 102 of 105</a:t>
             </a:r>
           </a:p>
         </p:txBody>
@@ -5794,7 +5794,7 @@
               </a:defRPr>
             </a:pPr>
             <a:r>
-              <a:t>WhatsApp / Helpline: +91 91101 13671  |  वेबसाइट: sagarcoaching.tech  |  Slide 103 of 105</a:t>
+              <a:t>वेबसाइट: sagarcoaching.tech  |  Slide 103 of 105</a:t>
             </a:r>
           </a:p>
         </p:txBody>
@@ -6116,7 +6116,7 @@
               </a:defRPr>
             </a:pPr>
             <a:r>
-              <a:t>WhatsApp / Helpline: +91 91101 13671  |  वेबसाइट: sagarcoaching.tech  |  Slide 104 of 105</a:t>
+              <a:t>वेबसाइट: sagarcoaching.tech  |  Slide 104 of 105</a:t>
             </a:r>
           </a:p>
         </p:txBody>
@@ -6407,7 +6407,7 @@
               </a:defRPr>
             </a:pPr>
             <a:r>
-              <a:t>WhatsApp / Helpline: +91 91101 13671  |  वेबसाइट: sagarcoaching.tech  |  Slide 105 of 105</a:t>
+              <a:t>वेबसाइट: sagarcoaching.tech  |  Slide 105 of 105</a:t>
             </a:r>
           </a:p>
         </p:txBody>
@@ -6510,7 +6510,7 @@
               </a:defRPr>
             </a:pPr>
             <a:r>
-              <a:t>मार्गदर्शक: सागर सर (NMMS King)  |  WhatsApp / Helpline: +91 91101 13671</a:t>
+              <a:t>मार्गदर्शक: सागर सर (NMMS King)</a:t>
             </a:r>
           </a:p>
           <a:p>
@@ -6698,7 +6698,7 @@
               </a:defRPr>
             </a:pPr>
             <a:r>
-              <a:t>WhatsApp / Helpline: +91 91101 13671  |  वेबसाइट: sagarcoaching.tech  |  Slide 11 of 105</a:t>
+              <a:t>वेबसाइट: sagarcoaching.tech  |  Slide 11 of 105</a:t>
             </a:r>
           </a:p>
         </p:txBody>
@@ -7145,7 +7145,7 @@
               </a:defRPr>
             </a:pPr>
             <a:r>
-              <a:t>WhatsApp / Helpline: +91 91101 13671  |  वेबसाइट: sagarcoaching.tech  |  Slide 12 of 105</a:t>
+              <a:t>वेबसाइट: sagarcoaching.tech  |  Slide 12 of 105</a:t>
             </a:r>
           </a:p>
         </p:txBody>
@@ -7663,7 +7663,7 @@
               </a:defRPr>
             </a:pPr>
             <a:r>
-              <a:t>WhatsApp / Helpline: +91 91101 13671  |  वेबसाइट: sagarcoaching.tech  |  Slide 13 of 105</a:t>
+              <a:t>वेबसाइट: sagarcoaching.tech  |  Slide 13 of 105</a:t>
             </a:r>
           </a:p>
         </p:txBody>
@@ -8110,7 +8110,7 @@
               </a:defRPr>
             </a:pPr>
             <a:r>
-              <a:t>WhatsApp / Helpline: +91 91101 13671  |  वेबसाइट: sagarcoaching.tech  |  Slide 14 of 105</a:t>
+              <a:t>वेबसाइट: sagarcoaching.tech  |  Slide 14 of 105</a:t>
             </a:r>
           </a:p>
         </p:txBody>
@@ -8628,7 +8628,7 @@
               </a:defRPr>
             </a:pPr>
             <a:r>
-              <a:t>WhatsApp / Helpline: +91 91101 13671  |  वेबसाइट: sagarcoaching.tech  |  Slide 15 of 105</a:t>
+              <a:t>वेबसाइट: sagarcoaching.tech  |  Slide 15 of 105</a:t>
             </a:r>
           </a:p>
         </p:txBody>
@@ -9075,7 +9075,7 @@
               </a:defRPr>
             </a:pPr>
             <a:r>
-              <a:t>WhatsApp / Helpline: +91 91101 13671  |  वेबसाइट: sagarcoaching.tech  |  Slide 16 of 105</a:t>
+              <a:t>वेबसाइट: sagarcoaching.tech  |  Slide 16 of 105</a:t>
             </a:r>
           </a:p>
         </p:txBody>
@@ -9593,7 +9593,7 @@
               </a:defRPr>
             </a:pPr>
             <a:r>
-              <a:t>WhatsApp / Helpline: +91 91101 13671  |  वेबसाइट: sagarcoaching.tech  |  Slide 17 of 105</a:t>
+              <a:t>वेबसाइट: sagarcoaching.tech  |  Slide 17 of 105</a:t>
             </a:r>
           </a:p>
         </p:txBody>
@@ -10040,7 +10040,7 @@
               </a:defRPr>
             </a:pPr>
             <a:r>
-              <a:t>WhatsApp / Helpline: +91 91101 13671  |  वेबसाइट: sagarcoaching.tech  |  Slide 18 of 105</a:t>
+              <a:t>वेबसाइट: sagarcoaching.tech  |  Slide 18 of 105</a:t>
             </a:r>
           </a:p>
         </p:txBody>
@@ -10558,7 +10558,7 @@
               </a:defRPr>
             </a:pPr>
             <a:r>
-              <a:t>WhatsApp / Helpline: +91 91101 13671  |  वेबसाइट: sagarcoaching.tech  |  Slide 19 of 105</a:t>
+              <a:t>वेबसाइट: sagarcoaching.tech  |  Slide 19 of 105</a:t>
             </a:r>
           </a:p>
         </p:txBody>
@@ -11005,7 +11005,7 @@
               </a:defRPr>
             </a:pPr>
             <a:r>
-              <a:t>WhatsApp / Helpline: +91 91101 13671  |  वेबसाइट: sagarcoaching.tech  |  Slide 2 of 105</a:t>
+              <a:t>वेबसाइट: sagarcoaching.tech  |  Slide 2 of 105</a:t>
             </a:r>
           </a:p>
         </p:txBody>
@@ -11327,7 +11327,7 @@
               </a:defRPr>
             </a:pPr>
             <a:r>
-              <a:t>WhatsApp / Helpline: +91 91101 13671  |  वेबसाइट: sagarcoaching.tech  |  Slide 20 of 105</a:t>
+              <a:t>वेबसाइट: sagarcoaching.tech  |  Slide 20 of 105</a:t>
             </a:r>
           </a:p>
         </p:txBody>
@@ -11845,7 +11845,7 @@
               </a:defRPr>
             </a:pPr>
             <a:r>
-              <a:t>WhatsApp / Helpline: +91 91101 13671  |  वेबसाइट: sagarcoaching.tech  |  Slide 21 of 105</a:t>
+              <a:t>वेबसाइट: sagarcoaching.tech  |  Slide 21 of 105</a:t>
             </a:r>
           </a:p>
         </p:txBody>
@@ -12292,7 +12292,7 @@
               </a:defRPr>
             </a:pPr>
             <a:r>
-              <a:t>WhatsApp / Helpline: +91 91101 13671  |  वेबसाइट: sagarcoaching.tech  |  Slide 22 of 105</a:t>
+              <a:t>वेबसाइट: sagarcoaching.tech  |  Slide 22 of 105</a:t>
             </a:r>
           </a:p>
         </p:txBody>
@@ -12810,7 +12810,7 @@
               </a:defRPr>
             </a:pPr>
             <a:r>
-              <a:t>WhatsApp / Helpline: +91 91101 13671  |  वेबसाइट: sagarcoaching.tech  |  Slide 23 of 105</a:t>
+              <a:t>वेबसाइट: sagarcoaching.tech  |  Slide 23 of 105</a:t>
             </a:r>
           </a:p>
         </p:txBody>
@@ -13257,7 +13257,7 @@
               </a:defRPr>
             </a:pPr>
             <a:r>
-              <a:t>WhatsApp / Helpline: +91 91101 13671  |  वेबसाइट: sagarcoaching.tech  |  Slide 24 of 105</a:t>
+              <a:t>वेबसाइट: sagarcoaching.tech  |  Slide 24 of 105</a:t>
             </a:r>
           </a:p>
         </p:txBody>
@@ -13775,7 +13775,7 @@
               </a:defRPr>
             </a:pPr>
             <a:r>
-              <a:t>WhatsApp / Helpline: +91 91101 13671  |  वेबसाइट: sagarcoaching.tech  |  Slide 25 of 105</a:t>
+              <a:t>वेबसाइट: sagarcoaching.tech  |  Slide 25 of 105</a:t>
             </a:r>
           </a:p>
         </p:txBody>
@@ -14222,7 +14222,7 @@
               </a:defRPr>
             </a:pPr>
             <a:r>
-              <a:t>WhatsApp / Helpline: +91 91101 13671  |  वेबसाइट: sagarcoaching.tech  |  Slide 26 of 105</a:t>
+              <a:t>वेबसाइट: sagarcoaching.tech  |  Slide 26 of 105</a:t>
             </a:r>
           </a:p>
         </p:txBody>
@@ -14740,7 +14740,7 @@
               </a:defRPr>
             </a:pPr>
             <a:r>
-              <a:t>WhatsApp / Helpline: +91 91101 13671  |  वेबसाइट: sagarcoaching.tech  |  Slide 27 of 105</a:t>
+              <a:t>वेबसाइट: sagarcoaching.tech  |  Slide 27 of 105</a:t>
             </a:r>
           </a:p>
         </p:txBody>
@@ -15187,7 +15187,7 @@
               </a:defRPr>
             </a:pPr>
             <a:r>
-              <a:t>WhatsApp / Helpline: +91 91101 13671  |  वेबसाइट: sagarcoaching.tech  |  Slide 28 of 105</a:t>
+              <a:t>वेबसाइट: sagarcoaching.tech  |  Slide 28 of 105</a:t>
             </a:r>
           </a:p>
         </p:txBody>
@@ -15705,7 +15705,7 @@
               </a:defRPr>
             </a:pPr>
             <a:r>
-              <a:t>WhatsApp / Helpline: +91 91101 13671  |  वेबसाइट: sagarcoaching.tech  |  Slide 29 of 105</a:t>
+              <a:t>वेबसाइट: sagarcoaching.tech  |  Slide 29 of 105</a:t>
             </a:r>
           </a:p>
         </p:txBody>
@@ -16152,7 +16152,7 @@
               </a:defRPr>
             </a:pPr>
             <a:r>
-              <a:t>WhatsApp / Helpline: +91 91101 13671  |  वेबसाइट: sagarcoaching.tech  |  Slide 3 of 105</a:t>
+              <a:t>वेबसाइट: sagarcoaching.tech  |  Slide 3 of 105</a:t>
             </a:r>
           </a:p>
         </p:txBody>
@@ -16599,7 +16599,7 @@
               </a:defRPr>
             </a:pPr>
             <a:r>
-              <a:t>WhatsApp / Helpline: +91 91101 13671  |  वेबसाइट: sagarcoaching.tech  |  Slide 30 of 105</a:t>
+              <a:t>वेबसाइट: sagarcoaching.tech  |  Slide 30 of 105</a:t>
             </a:r>
           </a:p>
         </p:txBody>
@@ -17117,7 +17117,7 @@
               </a:defRPr>
             </a:pPr>
             <a:r>
-              <a:t>WhatsApp / Helpline: +91 91101 13671  |  वेबसाइट: sagarcoaching.tech  |  Slide 31 of 105</a:t>
+              <a:t>वेबसाइट: sagarcoaching.tech  |  Slide 31 of 105</a:t>
             </a:r>
           </a:p>
         </p:txBody>
@@ -17564,7 +17564,7 @@
               </a:defRPr>
             </a:pPr>
             <a:r>
-              <a:t>WhatsApp / Helpline: +91 91101 13671  |  वेबसाइट: sagarcoaching.tech  |  Slide 32 of 105</a:t>
+              <a:t>वेबसाइट: sagarcoaching.tech  |  Slide 32 of 105</a:t>
             </a:r>
           </a:p>
         </p:txBody>
@@ -18082,7 +18082,7 @@
               </a:defRPr>
             </a:pPr>
             <a:r>
-              <a:t>WhatsApp / Helpline: +91 91101 13671  |  वेबसाइट: sagarcoaching.tech  |  Slide 33 of 105</a:t>
+              <a:t>वेबसाइट: sagarcoaching.tech  |  Slide 33 of 105</a:t>
             </a:r>
           </a:p>
         </p:txBody>
@@ -18529,7 +18529,7 @@
               </a:defRPr>
             </a:pPr>
             <a:r>
-              <a:t>WhatsApp / Helpline: +91 91101 13671  |  वेबसाइट: sagarcoaching.tech  |  Slide 34 of 105</a:t>
+              <a:t>वेबसाइट: sagarcoaching.tech  |  Slide 34 of 105</a:t>
             </a:r>
           </a:p>
         </p:txBody>
@@ -19047,7 +19047,7 @@
               </a:defRPr>
             </a:pPr>
             <a:r>
-              <a:t>WhatsApp / Helpline: +91 91101 13671  |  वेबसाइट: sagarcoaching.tech  |  Slide 35 of 105</a:t>
+              <a:t>वेबसाइट: sagarcoaching.tech  |  Slide 35 of 105</a:t>
             </a:r>
           </a:p>
         </p:txBody>
@@ -19494,7 +19494,7 @@
               </a:defRPr>
             </a:pPr>
             <a:r>
-              <a:t>WhatsApp / Helpline: +91 91101 13671  |  वेबसाइट: sagarcoaching.tech  |  Slide 36 of 105</a:t>
+              <a:t>वेबसाइट: sagarcoaching.tech  |  Slide 36 of 105</a:t>
             </a:r>
           </a:p>
         </p:txBody>
@@ -20012,7 +20012,7 @@
               </a:defRPr>
             </a:pPr>
             <a:r>
-              <a:t>WhatsApp / Helpline: +91 91101 13671  |  वेबसाइट: sagarcoaching.tech  |  Slide 37 of 105</a:t>
+              <a:t>वेबसाइट: sagarcoaching.tech  |  Slide 37 of 105</a:t>
             </a:r>
           </a:p>
         </p:txBody>
@@ -20459,7 +20459,7 @@
               </a:defRPr>
             </a:pPr>
             <a:r>
-              <a:t>WhatsApp / Helpline: +91 91101 13671  |  वेबसाइट: sagarcoaching.tech  |  Slide 38 of 105</a:t>
+              <a:t>वेबसाइट: sagarcoaching.tech  |  Slide 38 of 105</a:t>
             </a:r>
           </a:p>
         </p:txBody>
@@ -20977,7 +20977,7 @@
               </a:defRPr>
             </a:pPr>
             <a:r>
-              <a:t>WhatsApp / Helpline: +91 91101 13671  |  वेबसाइट: sagarcoaching.tech  |  Slide 39 of 105</a:t>
+              <a:t>वेबसाइट: sagarcoaching.tech  |  Slide 39 of 105</a:t>
             </a:r>
           </a:p>
         </p:txBody>
@@ -21424,7 +21424,7 @@
               </a:defRPr>
             </a:pPr>
             <a:r>
-              <a:t>WhatsApp / Helpline: +91 91101 13671  |  वेबसाइट: sagarcoaching.tech  |  Slide 4 of 105</a:t>
+              <a:t>वेबसाइट: sagarcoaching.tech  |  Slide 4 of 105</a:t>
             </a:r>
           </a:p>
         </p:txBody>
@@ -21942,7 +21942,7 @@
               </a:defRPr>
             </a:pPr>
             <a:r>
-              <a:t>WhatsApp / Helpline: +91 91101 13671  |  वेबसाइट: sagarcoaching.tech  |  Slide 40 of 105</a:t>
+              <a:t>वेबसाइट: sagarcoaching.tech  |  Slide 40 of 105</a:t>
             </a:r>
           </a:p>
         </p:txBody>
@@ -22460,7 +22460,7 @@
               </a:defRPr>
             </a:pPr>
             <a:r>
-              <a:t>WhatsApp / Helpline: +91 91101 13671  |  वेबसाइट: sagarcoaching.tech  |  Slide 41 of 105</a:t>
+              <a:t>वेबसाइट: sagarcoaching.tech  |  Slide 41 of 105</a:t>
             </a:r>
           </a:p>
         </p:txBody>
@@ -22907,7 +22907,7 @@
               </a:defRPr>
             </a:pPr>
             <a:r>
-              <a:t>WhatsApp / Helpline: +91 91101 13671  |  वेबसाइट: sagarcoaching.tech  |  Slide 42 of 105</a:t>
+              <a:t>वेबसाइट: sagarcoaching.tech  |  Slide 42 of 105</a:t>
             </a:r>
           </a:p>
         </p:txBody>
@@ -23425,7 +23425,7 @@
               </a:defRPr>
             </a:pPr>
             <a:r>
-              <a:t>WhatsApp / Helpline: +91 91101 13671  |  वेबसाइट: sagarcoaching.tech  |  Slide 43 of 105</a:t>
+              <a:t>वेबसाइट: sagarcoaching.tech  |  Slide 43 of 105</a:t>
             </a:r>
           </a:p>
         </p:txBody>
@@ -23872,7 +23872,7 @@
               </a:defRPr>
             </a:pPr>
             <a:r>
-              <a:t>WhatsApp / Helpline: +91 91101 13671  |  वेबसाइट: sagarcoaching.tech  |  Slide 44 of 105</a:t>
+              <a:t>वेबसाइट: sagarcoaching.tech  |  Slide 44 of 105</a:t>
             </a:r>
           </a:p>
         </p:txBody>
@@ -24390,7 +24390,7 @@
               </a:defRPr>
             </a:pPr>
             <a:r>
-              <a:t>WhatsApp / Helpline: +91 91101 13671  |  वेबसाइट: sagarcoaching.tech  |  Slide 45 of 105</a:t>
+              <a:t>वेबसाइट: sagarcoaching.tech  |  Slide 45 of 105</a:t>
             </a:r>
           </a:p>
         </p:txBody>
@@ -24837,7 +24837,7 @@
               </a:defRPr>
             </a:pPr>
             <a:r>
-              <a:t>WhatsApp / Helpline: +91 91101 13671  |  वेबसाइट: sagarcoaching.tech  |  Slide 46 of 105</a:t>
+              <a:t>वेबसाइट: sagarcoaching.tech  |  Slide 46 of 105</a:t>
             </a:r>
           </a:p>
         </p:txBody>
@@ -25355,7 +25355,7 @@
               </a:defRPr>
             </a:pPr>
             <a:r>
-              <a:t>WhatsApp / Helpline: +91 91101 13671  |  वेबसाइट: sagarcoaching.tech  |  Slide 47 of 105</a:t>
+              <a:t>वेबसाइट: sagarcoaching.tech  |  Slide 47 of 105</a:t>
             </a:r>
           </a:p>
         </p:txBody>
@@ -25802,7 +25802,7 @@
               </a:defRPr>
             </a:pPr>
             <a:r>
-              <a:t>WhatsApp / Helpline: +91 91101 13671  |  वेबसाइट: sagarcoaching.tech  |  Slide 48 of 105</a:t>
+              <a:t>वेबसाइट: sagarcoaching.tech  |  Slide 48 of 105</a:t>
             </a:r>
           </a:p>
         </p:txBody>
@@ -26320,7 +26320,7 @@
               </a:defRPr>
             </a:pPr>
             <a:r>
-              <a:t>WhatsApp / Helpline: +91 91101 13671  |  वेबसाइट: sagarcoaching.tech  |  Slide 49 of 105</a:t>
+              <a:t>वेबसाइट: sagarcoaching.tech  |  Slide 49 of 105</a:t>
             </a:r>
           </a:p>
         </p:txBody>
@@ -26767,7 +26767,7 @@
               </a:defRPr>
             </a:pPr>
             <a:r>
-              <a:t>WhatsApp / Helpline: +91 91101 13671  |  वेबसाइट: sagarcoaching.tech  |  Slide 5 of 105</a:t>
+              <a:t>वेबसाइट: sagarcoaching.tech  |  Slide 5 of 105</a:t>
             </a:r>
           </a:p>
         </p:txBody>
@@ -27214,7 +27214,7 @@
               </a:defRPr>
             </a:pPr>
             <a:r>
-              <a:t>WhatsApp / Helpline: +91 91101 13671  |  वेबसाइट: sagarcoaching.tech  |  Slide 50 of 105</a:t>
+              <a:t>वेबसाइट: sagarcoaching.tech  |  Slide 50 of 105</a:t>
             </a:r>
           </a:p>
         </p:txBody>
@@ -27732,7 +27732,7 @@
               </a:defRPr>
             </a:pPr>
             <a:r>
-              <a:t>WhatsApp / Helpline: +91 91101 13671  |  वेबसाइट: sagarcoaching.tech  |  Slide 51 of 105</a:t>
+              <a:t>वेबसाइट: sagarcoaching.tech  |  Slide 51 of 105</a:t>
             </a:r>
           </a:p>
         </p:txBody>
@@ -28179,7 +28179,7 @@
               </a:defRPr>
             </a:pPr>
             <a:r>
-              <a:t>WhatsApp / Helpline: +91 91101 13671  |  वेबसाइट: sagarcoaching.tech  |  Slide 52 of 105</a:t>
+              <a:t>वेबसाइट: sagarcoaching.tech  |  Slide 52 of 105</a:t>
             </a:r>
           </a:p>
         </p:txBody>
@@ -28697,7 +28697,7 @@
               </a:defRPr>
             </a:pPr>
             <a:r>
-              <a:t>WhatsApp / Helpline: +91 91101 13671  |  वेबसाइट: sagarcoaching.tech  |  Slide 53 of 105</a:t>
+              <a:t>वेबसाइट: sagarcoaching.tech  |  Slide 53 of 105</a:t>
             </a:r>
           </a:p>
         </p:txBody>
@@ -29144,7 +29144,7 @@
               </a:defRPr>
             </a:pPr>
             <a:r>
-              <a:t>WhatsApp / Helpline: +91 91101 13671  |  वेबसाइट: sagarcoaching.tech  |  Slide 54 of 105</a:t>
+              <a:t>वेबसाइट: sagarcoaching.tech  |  Slide 54 of 105</a:t>
             </a:r>
           </a:p>
         </p:txBody>
@@ -29662,7 +29662,7 @@
               </a:defRPr>
             </a:pPr>
             <a:r>
-              <a:t>WhatsApp / Helpline: +91 91101 13671  |  वेबसाइट: sagarcoaching.tech  |  Slide 55 of 105</a:t>
+              <a:t>वेबसाइट: sagarcoaching.tech  |  Slide 55 of 105</a:t>
             </a:r>
           </a:p>
         </p:txBody>
@@ -30109,7 +30109,7 @@
               </a:defRPr>
             </a:pPr>
             <a:r>
-              <a:t>WhatsApp / Helpline: +91 91101 13671  |  वेबसाइट: sagarcoaching.tech  |  Slide 56 of 105</a:t>
+              <a:t>वेबसाइट: sagarcoaching.tech  |  Slide 56 of 105</a:t>
             </a:r>
           </a:p>
         </p:txBody>
@@ -30627,7 +30627,7 @@
               </a:defRPr>
             </a:pPr>
             <a:r>
-              <a:t>WhatsApp / Helpline: +91 91101 13671  |  वेबसाइट: sagarcoaching.tech  |  Slide 57 of 105</a:t>
+              <a:t>वेबसाइट: sagarcoaching.tech  |  Slide 57 of 105</a:t>
             </a:r>
           </a:p>
         </p:txBody>
@@ -31074,7 +31074,7 @@
               </a:defRPr>
             </a:pPr>
             <a:r>
-              <a:t>WhatsApp / Helpline: +91 91101 13671  |  वेबसाइट: sagarcoaching.tech  |  Slide 58 of 105</a:t>
+              <a:t>वेबसाइट: sagarcoaching.tech  |  Slide 58 of 105</a:t>
             </a:r>
           </a:p>
         </p:txBody>
@@ -31592,7 +31592,7 @@
               </a:defRPr>
             </a:pPr>
             <a:r>
-              <a:t>WhatsApp / Helpline: +91 91101 13671  |  वेबसाइट: sagarcoaching.tech  |  Slide 59 of 105</a:t>
+              <a:t>वेबसाइट: sagarcoaching.tech  |  Slide 59 of 105</a:t>
             </a:r>
           </a:p>
         </p:txBody>
@@ -32039,7 +32039,7 @@
               </a:defRPr>
             </a:pPr>
             <a:r>
-              <a:t>WhatsApp / Helpline: +91 91101 13671  |  वेबसाइट: sagarcoaching.tech  |  Slide 6 of 105</a:t>
+              <a:t>वेबसाइट: sagarcoaching.tech  |  Slide 6 of 105</a:t>
             </a:r>
           </a:p>
         </p:txBody>
@@ -32557,7 +32557,7 @@
               </a:defRPr>
             </a:pPr>
             <a:r>
-              <a:t>WhatsApp / Helpline: +91 91101 13671  |  वेबसाइट: sagarcoaching.tech  |  Slide 60 of 105</a:t>
+              <a:t>वेबसाइट: sagarcoaching.tech  |  Slide 60 of 105</a:t>
             </a:r>
           </a:p>
         </p:txBody>
@@ -33075,7 +33075,7 @@
               </a:defRPr>
             </a:pPr>
             <a:r>
-              <a:t>WhatsApp / Helpline: +91 91101 13671  |  वेबसाइट: sagarcoaching.tech  |  Slide 61 of 105</a:t>
+              <a:t>वेबसाइट: sagarcoaching.tech  |  Slide 61 of 105</a:t>
             </a:r>
           </a:p>
         </p:txBody>
@@ -33522,7 +33522,7 @@
               </a:defRPr>
             </a:pPr>
             <a:r>
-              <a:t>WhatsApp / Helpline: +91 91101 13671  |  वेबसाइट: sagarcoaching.tech  |  Slide 62 of 105</a:t>
+              <a:t>वेबसाइट: sagarcoaching.tech  |  Slide 62 of 105</a:t>
             </a:r>
           </a:p>
         </p:txBody>
@@ -34040,7 +34040,7 @@
               </a:defRPr>
             </a:pPr>
             <a:r>
-              <a:t>WhatsApp / Helpline: +91 91101 13671  |  वेबसाइट: sagarcoaching.tech  |  Slide 63 of 105</a:t>
+              <a:t>वेबसाइट: sagarcoaching.tech  |  Slide 63 of 105</a:t>
             </a:r>
           </a:p>
         </p:txBody>
@@ -34487,7 +34487,7 @@
               </a:defRPr>
             </a:pPr>
             <a:r>
-              <a:t>WhatsApp / Helpline: +91 91101 13671  |  वेबसाइट: sagarcoaching.tech  |  Slide 64 of 105</a:t>
+              <a:t>वेबसाइट: sagarcoaching.tech  |  Slide 64 of 105</a:t>
             </a:r>
           </a:p>
         </p:txBody>
@@ -35005,7 +35005,7 @@
               </a:defRPr>
             </a:pPr>
             <a:r>
-              <a:t>WhatsApp / Helpline: +91 91101 13671  |  वेबसाइट: sagarcoaching.tech  |  Slide 65 of 105</a:t>
+              <a:t>वेबसाइट: sagarcoaching.tech  |  Slide 65 of 105</a:t>
             </a:r>
           </a:p>
         </p:txBody>
@@ -35452,7 +35452,7 @@
               </a:defRPr>
             </a:pPr>
             <a:r>
-              <a:t>WhatsApp / Helpline: +91 91101 13671  |  वेबसाइट: sagarcoaching.tech  |  Slide 66 of 105</a:t>
+              <a:t>वेबसाइट: sagarcoaching.tech  |  Slide 66 of 105</a:t>
             </a:r>
           </a:p>
         </p:txBody>
@@ -35970,7 +35970,7 @@
               </a:defRPr>
             </a:pPr>
             <a:r>
-              <a:t>WhatsApp / Helpline: +91 91101 13671  |  वेबसाइट: sagarcoaching.tech  |  Slide 67 of 105</a:t>
+              <a:t>वेबसाइट: sagarcoaching.tech  |  Slide 67 of 105</a:t>
             </a:r>
           </a:p>
         </p:txBody>
@@ -36417,7 +36417,7 @@
               </a:defRPr>
             </a:pPr>
             <a:r>
-              <a:t>WhatsApp / Helpline: +91 91101 13671  |  वेबसाइट: sagarcoaching.tech  |  Slide 68 of 105</a:t>
+              <a:t>वेबसाइट: sagarcoaching.tech  |  Slide 68 of 105</a:t>
             </a:r>
           </a:p>
         </p:txBody>
@@ -36935,7 +36935,7 @@
               </a:defRPr>
             </a:pPr>
             <a:r>
-              <a:t>WhatsApp / Helpline: +91 91101 13671  |  वेबसाइट: sagarcoaching.tech  |  Slide 69 of 105</a:t>
+              <a:t>वेबसाइट: sagarcoaching.tech  |  Slide 69 of 105</a:t>
             </a:r>
           </a:p>
         </p:txBody>
@@ -37382,7 +37382,7 @@
               </a:defRPr>
             </a:pPr>
             <a:r>
-              <a:t>WhatsApp / Helpline: +91 91101 13671  |  वेबसाइट: sagarcoaching.tech  |  Slide 7 of 105</a:t>
+              <a:t>वेबसाइट: sagarcoaching.tech  |  Slide 7 of 105</a:t>
             </a:r>
           </a:p>
         </p:txBody>
@@ -37829,7 +37829,7 @@
               </a:defRPr>
             </a:pPr>
             <a:r>
-              <a:t>WhatsApp / Helpline: +91 91101 13671  |  वेबसाइट: sagarcoaching.tech  |  Slide 70 of 105</a:t>
+              <a:t>वेबसाइट: sagarcoaching.tech  |  Slide 70 of 105</a:t>
             </a:r>
           </a:p>
         </p:txBody>
@@ -38347,7 +38347,7 @@
               </a:defRPr>
             </a:pPr>
             <a:r>
-              <a:t>WhatsApp / Helpline: +91 91101 13671  |  वेबसाइट: sagarcoaching.tech  |  Slide 71 of 105</a:t>
+              <a:t>वेबसाइट: sagarcoaching.tech  |  Slide 71 of 105</a:t>
             </a:r>
           </a:p>
         </p:txBody>
@@ -38794,7 +38794,7 @@
               </a:defRPr>
             </a:pPr>
             <a:r>
-              <a:t>WhatsApp / Helpline: +91 91101 13671  |  वेबसाइट: sagarcoaching.tech  |  Slide 72 of 105</a:t>
+              <a:t>वेबसाइट: sagarcoaching.tech  |  Slide 72 of 105</a:t>
             </a:r>
           </a:p>
         </p:txBody>
@@ -39312,7 +39312,7 @@
               </a:defRPr>
             </a:pPr>
             <a:r>
-              <a:t>WhatsApp / Helpline: +91 91101 13671  |  वेबसाइट: sagarcoaching.tech  |  Slide 73 of 105</a:t>
+              <a:t>वेबसाइट: sagarcoaching.tech  |  Slide 73 of 105</a:t>
             </a:r>
           </a:p>
         </p:txBody>
@@ -39759,7 +39759,7 @@
               </a:defRPr>
             </a:pPr>
             <a:r>
-              <a:t>WhatsApp / Helpline: +91 91101 13671  |  वेबसाइट: sagarcoaching.tech  |  Slide 74 of 105</a:t>
+              <a:t>वेबसाइट: sagarcoaching.tech  |  Slide 74 of 105</a:t>
             </a:r>
           </a:p>
         </p:txBody>
@@ -40277,7 +40277,7 @@
               </a:defRPr>
             </a:pPr>
             <a:r>
-              <a:t>WhatsApp / Helpline: +91 91101 13671  |  वेबसाइट: sagarcoaching.tech  |  Slide 75 of 105</a:t>
+              <a:t>वेबसाइट: sagarcoaching.tech  |  Slide 75 of 105</a:t>
             </a:r>
           </a:p>
         </p:txBody>
@@ -40724,7 +40724,7 @@
               </a:defRPr>
             </a:pPr>
             <a:r>
-              <a:t>WhatsApp / Helpline: +91 91101 13671  |  वेबसाइट: sagarcoaching.tech  |  Slide 76 of 105</a:t>
+              <a:t>वेबसाइट: sagarcoaching.tech  |  Slide 76 of 105</a:t>
             </a:r>
           </a:p>
         </p:txBody>
@@ -41242,7 +41242,7 @@
               </a:defRPr>
             </a:pPr>
             <a:r>
-              <a:t>WhatsApp / Helpline: +91 91101 13671  |  वेबसाइट: sagarcoaching.tech  |  Slide 77 of 105</a:t>
+              <a:t>वेबसाइट: sagarcoaching.tech  |  Slide 77 of 105</a:t>
             </a:r>
           </a:p>
         </p:txBody>
@@ -41689,7 +41689,7 @@
               </a:defRPr>
             </a:pPr>
             <a:r>
-              <a:t>WhatsApp / Helpline: +91 91101 13671  |  वेबसाइट: sagarcoaching.tech  |  Slide 78 of 105</a:t>
+              <a:t>वेबसाइट: sagarcoaching.tech  |  Slide 78 of 105</a:t>
             </a:r>
           </a:p>
         </p:txBody>
@@ -42207,7 +42207,7 @@
               </a:defRPr>
             </a:pPr>
             <a:r>
-              <a:t>WhatsApp / Helpline: +91 91101 13671  |  वेबसाइट: sagarcoaching.tech  |  Slide 79 of 105</a:t>
+              <a:t>वेबसाइट: sagarcoaching.tech  |  Slide 79 of 105</a:t>
             </a:r>
           </a:p>
         </p:txBody>
@@ -42654,7 +42654,7 @@
               </a:defRPr>
             </a:pPr>
             <a:r>
-              <a:t>WhatsApp / Helpline: +91 91101 13671  |  वेबसाइट: sagarcoaching.tech  |  Slide 8 of 105</a:t>
+              <a:t>वेबसाइट: sagarcoaching.tech  |  Slide 8 of 105</a:t>
             </a:r>
           </a:p>
         </p:txBody>
@@ -43172,7 +43172,7 @@
               </a:defRPr>
             </a:pPr>
             <a:r>
-              <a:t>WhatsApp / Helpline: +91 91101 13671  |  वेबसाइट: sagarcoaching.tech  |  Slide 80 of 105</a:t>
+              <a:t>वेबसाइट: sagarcoaching.tech  |  Slide 80 of 105</a:t>
             </a:r>
           </a:p>
         </p:txBody>
@@ -43690,7 +43690,7 @@
               </a:defRPr>
             </a:pPr>
             <a:r>
-              <a:t>WhatsApp / Helpline: +91 91101 13671  |  वेबसाइट: sagarcoaching.tech  |  Slide 81 of 105</a:t>
+              <a:t>वेबसाइट: sagarcoaching.tech  |  Slide 81 of 105</a:t>
             </a:r>
           </a:p>
         </p:txBody>
@@ -44137,7 +44137,7 @@
               </a:defRPr>
             </a:pPr>
             <a:r>
-              <a:t>WhatsApp / Helpline: +91 91101 13671  |  वेबसाइट: sagarcoaching.tech  |  Slide 82 of 105</a:t>
+              <a:t>वेबसाइट: sagarcoaching.tech  |  Slide 82 of 105</a:t>
             </a:r>
           </a:p>
         </p:txBody>
@@ -44655,7 +44655,7 @@
               </a:defRPr>
             </a:pPr>
             <a:r>
-              <a:t>WhatsApp / Helpline: +91 91101 13671  |  वेबसाइट: sagarcoaching.tech  |  Slide 83 of 105</a:t>
+              <a:t>वेबसाइट: sagarcoaching.tech  |  Slide 83 of 105</a:t>
             </a:r>
           </a:p>
         </p:txBody>
@@ -45102,7 +45102,7 @@
               </a:defRPr>
             </a:pPr>
             <a:r>
-              <a:t>WhatsApp / Helpline: +91 91101 13671  |  वेबसाइट: sagarcoaching.tech  |  Slide 84 of 105</a:t>
+              <a:t>वेबसाइट: sagarcoaching.tech  |  Slide 84 of 105</a:t>
             </a:r>
           </a:p>
         </p:txBody>
@@ -45620,7 +45620,7 @@
               </a:defRPr>
             </a:pPr>
             <a:r>
-              <a:t>WhatsApp / Helpline: +91 91101 13671  |  वेबसाइट: sagarcoaching.tech  |  Slide 85 of 105</a:t>
+              <a:t>वेबसाइट: sagarcoaching.tech  |  Slide 85 of 105</a:t>
             </a:r>
           </a:p>
         </p:txBody>
@@ -46067,7 +46067,7 @@
               </a:defRPr>
             </a:pPr>
             <a:r>
-              <a:t>WhatsApp / Helpline: +91 91101 13671  |  वेबसाइट: sagarcoaching.tech  |  Slide 86 of 105</a:t>
+              <a:t>वेबसाइट: sagarcoaching.tech  |  Slide 86 of 105</a:t>
             </a:r>
           </a:p>
         </p:txBody>
@@ -46585,7 +46585,7 @@
               </a:defRPr>
             </a:pPr>
             <a:r>
-              <a:t>WhatsApp / Helpline: +91 91101 13671  |  वेबसाइट: sagarcoaching.tech  |  Slide 87 of 105</a:t>
+              <a:t>वेबसाइट: sagarcoaching.tech  |  Slide 87 of 105</a:t>
             </a:r>
           </a:p>
         </p:txBody>
@@ -47032,7 +47032,7 @@
               </a:defRPr>
             </a:pPr>
             <a:r>
-              <a:t>WhatsApp / Helpline: +91 91101 13671  |  वेबसाइट: sagarcoaching.tech  |  Slide 88 of 105</a:t>
+              <a:t>वेबसाइट: sagarcoaching.tech  |  Slide 88 of 105</a:t>
             </a:r>
           </a:p>
         </p:txBody>
@@ -47550,7 +47550,7 @@
               </a:defRPr>
             </a:pPr>
             <a:r>
-              <a:t>WhatsApp / Helpline: +91 91101 13671  |  वेबसाइट: sagarcoaching.tech  |  Slide 89 of 105</a:t>
+              <a:t>वेबसाइट: sagarcoaching.tech  |  Slide 89 of 105</a:t>
             </a:r>
           </a:p>
         </p:txBody>
@@ -47997,7 +47997,7 @@
               </a:defRPr>
             </a:pPr>
             <a:r>
-              <a:t>WhatsApp / Helpline: +91 91101 13671  |  वेबसाइट: sagarcoaching.tech  |  Slide 9 of 105</a:t>
+              <a:t>वेबसाइट: sagarcoaching.tech  |  Slide 9 of 105</a:t>
             </a:r>
           </a:p>
         </p:txBody>
@@ -48444,7 +48444,7 @@
               </a:defRPr>
             </a:pPr>
             <a:r>
-              <a:t>WhatsApp / Helpline: +91 91101 13671  |  वेबसाइट: sagarcoaching.tech  |  Slide 90 of 105</a:t>
+              <a:t>वेबसाइट: sagarcoaching.tech  |  Slide 90 of 105</a:t>
             </a:r>
           </a:p>
         </p:txBody>
@@ -48962,7 +48962,7 @@
               </a:defRPr>
             </a:pPr>
             <a:r>
-              <a:t>WhatsApp / Helpline: +91 91101 13671  |  वेबसाइट: sagarcoaching.tech  |  Slide 91 of 105</a:t>
+              <a:t>वेबसाइट: sagarcoaching.tech  |  Slide 91 of 105</a:t>
             </a:r>
           </a:p>
         </p:txBody>
@@ -49409,7 +49409,7 @@
               </a:defRPr>
             </a:pPr>
             <a:r>
-              <a:t>WhatsApp / Helpline: +91 91101 13671  |  वेबसाइट: sagarcoaching.tech  |  Slide 92 of 105</a:t>
+              <a:t>वेबसाइट: sagarcoaching.tech  |  Slide 92 of 105</a:t>
             </a:r>
           </a:p>
         </p:txBody>
@@ -49927,7 +49927,7 @@
               </a:defRPr>
             </a:pPr>
             <a:r>
-              <a:t>WhatsApp / Helpline: +91 91101 13671  |  वेबसाइट: sagarcoaching.tech  |  Slide 93 of 105</a:t>
+              <a:t>वेबसाइट: sagarcoaching.tech  |  Slide 93 of 105</a:t>
             </a:r>
           </a:p>
         </p:txBody>
@@ -50374,7 +50374,7 @@
               </a:defRPr>
             </a:pPr>
             <a:r>
-              <a:t>WhatsApp / Helpline: +91 91101 13671  |  वेबसाइट: sagarcoaching.tech  |  Slide 94 of 105</a:t>
+              <a:t>वेबसाइट: sagarcoaching.tech  |  Slide 94 of 105</a:t>
             </a:r>
           </a:p>
         </p:txBody>
@@ -50892,7 +50892,7 @@
               </a:defRPr>
             </a:pPr>
             <a:r>
-              <a:t>WhatsApp / Helpline: +91 91101 13671  |  वेबसाइट: sagarcoaching.tech  |  Slide 95 of 105</a:t>
+              <a:t>वेबसाइट: sagarcoaching.tech  |  Slide 95 of 105</a:t>
             </a:r>
           </a:p>
         </p:txBody>
@@ -51339,7 +51339,7 @@
               </a:defRPr>
             </a:pPr>
             <a:r>
-              <a:t>WhatsApp / Helpline: +91 91101 13671  |  वेबसाइट: sagarcoaching.tech  |  Slide 96 of 105</a:t>
+              <a:t>वेबसाइट: sagarcoaching.tech  |  Slide 96 of 105</a:t>
             </a:r>
           </a:p>
         </p:txBody>
@@ -51857,7 +51857,7 @@
               </a:defRPr>
             </a:pPr>
             <a:r>
-              <a:t>WhatsApp / Helpline: +91 91101 13671  |  वेबसाइट: sagarcoaching.tech  |  Slide 97 of 105</a:t>
+              <a:t>वेबसाइट: sagarcoaching.tech  |  Slide 97 of 105</a:t>
             </a:r>
           </a:p>
         </p:txBody>
@@ -52304,7 +52304,7 @@
               </a:defRPr>
             </a:pPr>
             <a:r>
-              <a:t>WhatsApp / Helpline: +91 91101 13671  |  वेबसाइट: sagarcoaching.tech  |  Slide 98 of 105</a:t>
+              <a:t>वेबसाइट: sagarcoaching.tech  |  Slide 98 of 105</a:t>
             </a:r>
           </a:p>
         </p:txBody>
@@ -52822,7 +52822,7 @@
               </a:defRPr>
             </a:pPr>
             <a:r>
-              <a:t>WhatsApp / Helpline: +91 91101 13671  |  वेबसाइट: sagarcoaching.tech  |  Slide 99 of 105</a:t>
+              <a:t>वेबसाइट: sagarcoaching.tech  |  Slide 99 of 105</a:t>
             </a:r>
           </a:p>
         </p:txBody>

--- a/Science_Complete_Course_SagarSir/04_Science_MahaManthan_मॉक_टेस्ट्स/Class_21_Grand_Final_Science_MahaManthan.pptx
+++ b/Science_Complete_Course_SagarSir/04_Science_MahaManthan_मॉक_टेस्ट्स/Class_21_Grand_Final_Science_MahaManthan.pptx
@@ -3585,7 +3585,7 @@
               </a:defRPr>
             </a:pPr>
             <a:r>
-              <a:t>  ✓  प्रत्येक प्रश्न का 2-स्लाइड इंटरैक्टिव पैटर्न एवं विस्तृत वैज्ञानिक व्याख्या</a:t>
+              <a:t>  ✓  प्रत्येक प्रश्न का सटीक हल एवं विस्तृत वैज्ञानिक व्याख्या</a:t>
             </a:r>
           </a:p>
         </p:txBody>
